--- a/src/ppt-super/assets/tpl-103-insight-taxonomy-decision/template.pptx
+++ b/src/ppt-super/assets/tpl-103-insight-taxonomy-decision/template.pptx
@@ -3104,8 +3104,8 @@
         </p:nvSpPr>
         <p:spPr>
           <a:xfrm>
-            <a:off x="279400" y="127000"/>
-            <a:ext cx="2413000" cy="215900"/>
+            <a:off x="279400" y="109537"/>
+            <a:ext cx="2413000" cy="250825"/>
           </a:xfrm>
           <a:prstGeom prst="rect">
             <a:avLst/>
@@ -3118,9 +3118,16 @@
           </a:bodyPr>
           <a:lstStyle/>
           <a:p>
-            <a:pPr algn="l"/>
-            <a:r>
-              <a:rPr sz="1500" b="0">
+            <a:pPr algn="l">
+              <a:spcBef>
+                <a:spcPts val="0"/>
+              </a:spcBef>
+              <a:spcAft>
+                <a:spcPts val="0"/>
+              </a:spcAft>
+            </a:pPr>
+            <a:r>
+              <a:rPr sz="1500" b="0" lang="zh-CN" altLang="zh-CN">
                 <a:solidFill>
                   <a:srgbClr val="617089"/>
                 </a:solidFill>
@@ -3155,9 +3162,16 @@
           </a:bodyPr>
           <a:lstStyle/>
           <a:p>
-            <a:pPr algn="r"/>
-            <a:r>
-              <a:rPr sz="1400" b="0">
+            <a:pPr algn="r">
+              <a:spcBef>
+                <a:spcPts val="0"/>
+              </a:spcBef>
+              <a:spcAft>
+                <a:spcPts val="0"/>
+              </a:spcAft>
+            </a:pPr>
+            <a:r>
+              <a:rPr sz="1400" b="0" lang="zh-CN" altLang="zh-CN">
                 <a:solidFill>
                   <a:srgbClr val="617089"/>
                 </a:solidFill>
@@ -3227,9 +3241,16 @@
           </a:bodyPr>
           <a:lstStyle/>
           <a:p>
-            <a:pPr algn="l"/>
-            <a:r>
-              <a:rPr sz="2500" b="1">
+            <a:pPr algn="l">
+              <a:spcBef>
+                <a:spcPts val="0"/>
+              </a:spcBef>
+              <a:spcAft>
+                <a:spcPts val="0"/>
+              </a:spcAft>
+            </a:pPr>
+            <a:r>
+              <a:rPr sz="2500" b="1" lang="zh-CN" altLang="zh-CN">
                 <a:solidFill>
                   <a:srgbClr val="B90A0A"/>
                 </a:solidFill>
@@ -3264,9 +3285,16 @@
           </a:bodyPr>
           <a:lstStyle/>
           <a:p>
-            <a:pPr algn="l"/>
-            <a:r>
-              <a:rPr sz="1400" b="0">
+            <a:pPr algn="l">
+              <a:spcBef>
+                <a:spcPts val="0"/>
+              </a:spcBef>
+              <a:spcAft>
+                <a:spcPts val="0"/>
+              </a:spcAft>
+            </a:pPr>
+            <a:r>
+              <a:rPr sz="1400" b="0" lang="zh-CN" altLang="zh-CN">
                 <a:solidFill>
                   <a:srgbClr val="14213D"/>
                 </a:solidFill>
@@ -3301,9 +3329,16 @@
           </a:bodyPr>
           <a:lstStyle/>
           <a:p>
-            <a:pPr algn="r"/>
-            <a:r>
-              <a:rPr sz="900" b="0">
+            <a:pPr algn="r">
+              <a:spcBef>
+                <a:spcPts val="0"/>
+              </a:spcBef>
+              <a:spcAft>
+                <a:spcPts val="0"/>
+              </a:spcAft>
+            </a:pPr>
+            <a:r>
+              <a:rPr sz="900" b="0" lang="zh-CN" altLang="zh-CN">
                 <a:solidFill>
                   <a:srgbClr val="617089"/>
                 </a:solidFill>
@@ -3357,7 +3392,14 @@
           <a:bodyPr rtlCol="0" anchor="ctr"/>
           <a:lstStyle/>
           <a:p>
-            <a:pPr algn="ctr"/>
+            <a:pPr algn="ctr">
+              <a:spcBef>
+                <a:spcPts val="0"/>
+              </a:spcBef>
+              <a:spcAft>
+                <a:spcPts val="0"/>
+              </a:spcAft>
+            </a:pPr>
           </a:p>
         </p:txBody>
       </p:sp>
@@ -3369,8 +3411,8 @@
         </p:nvSpPr>
         <p:spPr>
           <a:xfrm>
-            <a:off x="2387600" y="1511300"/>
-            <a:ext cx="2025650" cy="215900"/>
+            <a:off x="2387600" y="1470977"/>
+            <a:ext cx="2025650" cy="296545"/>
           </a:xfrm>
           <a:prstGeom prst="rect">
             <a:avLst/>
@@ -3383,9 +3425,16 @@
           </a:bodyPr>
           <a:lstStyle/>
           <a:p>
-            <a:pPr algn="ctr"/>
-            <a:r>
-              <a:rPr sz="1800" b="1">
+            <a:pPr algn="ctr">
+              <a:spcBef>
+                <a:spcPts val="0"/>
+              </a:spcBef>
+              <a:spcAft>
+                <a:spcPts val="0"/>
+              </a:spcAft>
+            </a:pPr>
+            <a:r>
+              <a:rPr sz="1800" b="1" lang="zh-CN" altLang="zh-CN">
                 <a:solidFill>
                   <a:srgbClr val="FFFFFF"/>
                 </a:solidFill>
@@ -3406,8 +3455,8 @@
         </p:nvSpPr>
         <p:spPr>
           <a:xfrm>
-            <a:off x="4641850" y="1511300"/>
-            <a:ext cx="2025650" cy="215900"/>
+            <a:off x="4641850" y="1470977"/>
+            <a:ext cx="2025650" cy="296545"/>
           </a:xfrm>
           <a:prstGeom prst="rect">
             <a:avLst/>
@@ -3420,9 +3469,16 @@
           </a:bodyPr>
           <a:lstStyle/>
           <a:p>
-            <a:pPr algn="ctr"/>
-            <a:r>
-              <a:rPr sz="1800" b="1">
+            <a:pPr algn="ctr">
+              <a:spcBef>
+                <a:spcPts val="0"/>
+              </a:spcBef>
+              <a:spcAft>
+                <a:spcPts val="0"/>
+              </a:spcAft>
+            </a:pPr>
+            <a:r>
+              <a:rPr sz="1800" b="1" lang="zh-CN" altLang="zh-CN">
                 <a:solidFill>
                   <a:srgbClr val="FFFFFF"/>
                 </a:solidFill>
@@ -3478,8 +3534,8 @@
         </p:nvSpPr>
         <p:spPr>
           <a:xfrm>
-            <a:off x="6896100" y="1511300"/>
-            <a:ext cx="2025650" cy="215900"/>
+            <a:off x="6896100" y="1470977"/>
+            <a:ext cx="2025650" cy="296545"/>
           </a:xfrm>
           <a:prstGeom prst="rect">
             <a:avLst/>
@@ -3492,9 +3548,16 @@
           </a:bodyPr>
           <a:lstStyle/>
           <a:p>
-            <a:pPr algn="ctr"/>
-            <a:r>
-              <a:rPr sz="1800" b="1">
+            <a:pPr algn="ctr">
+              <a:spcBef>
+                <a:spcPts val="0"/>
+              </a:spcBef>
+              <a:spcAft>
+                <a:spcPts val="0"/>
+              </a:spcAft>
+            </a:pPr>
+            <a:r>
+              <a:rPr sz="1800" b="1" lang="zh-CN" altLang="zh-CN">
                 <a:solidFill>
                   <a:srgbClr val="FFFFFF"/>
                 </a:solidFill>
@@ -3583,7 +3646,14 @@
           <a:bodyPr rtlCol="0" anchor="ctr"/>
           <a:lstStyle/>
           <a:p>
-            <a:pPr algn="ctr"/>
+            <a:pPr algn="ctr">
+              <a:spcBef>
+                <a:spcPts val="0"/>
+              </a:spcBef>
+              <a:spcAft>
+                <a:spcPts val="0"/>
+              </a:spcAft>
+            </a:pPr>
           </a:p>
         </p:txBody>
       </p:sp>
@@ -3628,7 +3698,14 @@
           <a:bodyPr rtlCol="0" anchor="ctr"/>
           <a:lstStyle/>
           <a:p>
-            <a:pPr algn="ctr"/>
+            <a:pPr algn="ctr">
+              <a:spcBef>
+                <a:spcPts val="0"/>
+              </a:spcBef>
+              <a:spcAft>
+                <a:spcPts val="0"/>
+              </a:spcAft>
+            </a:pPr>
           </a:p>
         </p:txBody>
       </p:sp>
@@ -3724,9 +3801,16 @@
           </a:bodyPr>
           <a:lstStyle/>
           <a:p>
-            <a:pPr algn="l"/>
-            <a:r>
-              <a:rPr sz="1450" b="1">
+            <a:pPr algn="l">
+              <a:spcBef>
+                <a:spcPts val="0"/>
+              </a:spcBef>
+              <a:spcAft>
+                <a:spcPts val="0"/>
+              </a:spcAft>
+            </a:pPr>
+            <a:r>
+              <a:rPr sz="1450" b="1" lang="zh-CN" altLang="zh-CN">
                 <a:solidFill>
                   <a:srgbClr val="0B3D91"/>
                 </a:solidFill>
@@ -3761,9 +3845,16 @@
           </a:bodyPr>
           <a:lstStyle/>
           <a:p>
-            <a:pPr algn="l"/>
-            <a:r>
-              <a:rPr sz="980" b="0">
+            <a:pPr algn="l">
+              <a:spcBef>
+                <a:spcPts val="0"/>
+              </a:spcBef>
+              <a:spcAft>
+                <a:spcPts val="0"/>
+              </a:spcAft>
+            </a:pPr>
+            <a:r>
+              <a:rPr sz="980" b="0" lang="zh-CN" altLang="zh-CN">
                 <a:solidFill>
                   <a:srgbClr val="14213D"/>
                 </a:solidFill>
@@ -3817,7 +3908,14 @@
           <a:bodyPr rtlCol="0" anchor="ctr"/>
           <a:lstStyle/>
           <a:p>
-            <a:pPr algn="ctr"/>
+            <a:pPr algn="ctr">
+              <a:spcBef>
+                <a:spcPts val="0"/>
+              </a:spcBef>
+              <a:spcAft>
+                <a:spcPts val="0"/>
+              </a:spcAft>
+            </a:pPr>
           </a:p>
         </p:txBody>
       </p:sp>
@@ -3829,8 +3927,8 @@
         </p:nvSpPr>
         <p:spPr>
           <a:xfrm>
-            <a:off x="2476500" y="2032000"/>
-            <a:ext cx="1873250" cy="165100"/>
+            <a:off x="2476500" y="2008187"/>
+            <a:ext cx="1873250" cy="212725"/>
           </a:xfrm>
           <a:prstGeom prst="rect">
             <a:avLst/>
@@ -3843,9 +3941,16 @@
           </a:bodyPr>
           <a:lstStyle/>
           <a:p>
-            <a:pPr algn="l"/>
-            <a:r>
-              <a:rPr sz="1250" b="1">
+            <a:pPr algn="l">
+              <a:spcBef>
+                <a:spcPts val="0"/>
+              </a:spcBef>
+              <a:spcAft>
+                <a:spcPts val="0"/>
+              </a:spcAft>
+            </a:pPr>
+            <a:r>
+              <a:rPr sz="1250" b="1" lang="zh-CN" altLang="zh-CN">
                 <a:solidFill>
                   <a:srgbClr val="14213D"/>
                 </a:solidFill>
@@ -3880,9 +3985,16 @@
           </a:bodyPr>
           <a:lstStyle/>
           <a:p>
-            <a:pPr algn="l"/>
-            <a:r>
-              <a:rPr sz="1000" b="0">
+            <a:pPr algn="l">
+              <a:spcBef>
+                <a:spcPts val="0"/>
+              </a:spcBef>
+              <a:spcAft>
+                <a:spcPts val="0"/>
+              </a:spcAft>
+            </a:pPr>
+            <a:r>
+              <a:rPr sz="1000" b="0" lang="zh-CN" altLang="zh-CN">
                 <a:solidFill>
                   <a:srgbClr val="14213D"/>
                 </a:solidFill>
@@ -3917,9 +4029,16 @@
           </a:bodyPr>
           <a:lstStyle/>
           <a:p>
-            <a:pPr algn="ctr"/>
-            <a:r>
-              <a:rPr sz="1000" b="1">
+            <a:pPr algn="ctr">
+              <a:spcBef>
+                <a:spcPts val="0"/>
+              </a:spcBef>
+              <a:spcAft>
+                <a:spcPts val="0"/>
+              </a:spcAft>
+            </a:pPr>
+            <a:r>
+              <a:rPr sz="1000" b="1" lang="zh-CN" altLang="zh-CN">
                 <a:solidFill>
                   <a:srgbClr val="008C95"/>
                 </a:solidFill>
@@ -3973,7 +4092,14 @@
           <a:bodyPr rtlCol="0" anchor="ctr"/>
           <a:lstStyle/>
           <a:p>
-            <a:pPr algn="ctr"/>
+            <a:pPr algn="ctr">
+              <a:spcBef>
+                <a:spcPts val="0"/>
+              </a:spcBef>
+              <a:spcAft>
+                <a:spcPts val="0"/>
+              </a:spcAft>
+            </a:pPr>
           </a:p>
         </p:txBody>
       </p:sp>
@@ -3985,8 +4111,8 @@
         </p:nvSpPr>
         <p:spPr>
           <a:xfrm>
-            <a:off x="4730750" y="2032000"/>
-            <a:ext cx="1873250" cy="165100"/>
+            <a:off x="4730750" y="2008187"/>
+            <a:ext cx="1873250" cy="212725"/>
           </a:xfrm>
           <a:prstGeom prst="rect">
             <a:avLst/>
@@ -3999,9 +4125,16 @@
           </a:bodyPr>
           <a:lstStyle/>
           <a:p>
-            <a:pPr algn="l"/>
-            <a:r>
-              <a:rPr sz="1250" b="1">
+            <a:pPr algn="l">
+              <a:spcBef>
+                <a:spcPts val="0"/>
+              </a:spcBef>
+              <a:spcAft>
+                <a:spcPts val="0"/>
+              </a:spcAft>
+            </a:pPr>
+            <a:r>
+              <a:rPr sz="1250" b="1" lang="zh-CN" altLang="zh-CN">
                 <a:solidFill>
                   <a:srgbClr val="14213D"/>
                 </a:solidFill>
@@ -4036,9 +4169,16 @@
           </a:bodyPr>
           <a:lstStyle/>
           <a:p>
-            <a:pPr algn="l"/>
-            <a:r>
-              <a:rPr sz="1000" b="0">
+            <a:pPr algn="l">
+              <a:spcBef>
+                <a:spcPts val="0"/>
+              </a:spcBef>
+              <a:spcAft>
+                <a:spcPts val="0"/>
+              </a:spcAft>
+            </a:pPr>
+            <a:r>
+              <a:rPr sz="1000" b="0" lang="zh-CN" altLang="zh-CN">
                 <a:solidFill>
                   <a:srgbClr val="14213D"/>
                 </a:solidFill>
@@ -4073,9 +4213,16 @@
           </a:bodyPr>
           <a:lstStyle/>
           <a:p>
-            <a:pPr algn="ctr"/>
-            <a:r>
-              <a:rPr sz="1000" b="1">
+            <a:pPr algn="ctr">
+              <a:spcBef>
+                <a:spcPts val="0"/>
+              </a:spcBef>
+              <a:spcAft>
+                <a:spcPts val="0"/>
+              </a:spcAft>
+            </a:pPr>
+            <a:r>
+              <a:rPr sz="1000" b="1" lang="zh-CN" altLang="zh-CN">
                 <a:solidFill>
                   <a:srgbClr val="F97316"/>
                 </a:solidFill>
@@ -4129,7 +4276,14 @@
           <a:bodyPr rtlCol="0" anchor="ctr"/>
           <a:lstStyle/>
           <a:p>
-            <a:pPr algn="ctr"/>
+            <a:pPr algn="ctr">
+              <a:spcBef>
+                <a:spcPts val="0"/>
+              </a:spcBef>
+              <a:spcAft>
+                <a:spcPts val="0"/>
+              </a:spcAft>
+            </a:pPr>
           </a:p>
         </p:txBody>
       </p:sp>
@@ -4141,8 +4295,8 @@
         </p:nvSpPr>
         <p:spPr>
           <a:xfrm>
-            <a:off x="6985000" y="2032000"/>
-            <a:ext cx="1873250" cy="165100"/>
+            <a:off x="6985000" y="2008187"/>
+            <a:ext cx="1873250" cy="212725"/>
           </a:xfrm>
           <a:prstGeom prst="rect">
             <a:avLst/>
@@ -4155,9 +4309,16 @@
           </a:bodyPr>
           <a:lstStyle/>
           <a:p>
-            <a:pPr algn="l"/>
-            <a:r>
-              <a:rPr sz="1250" b="1">
+            <a:pPr algn="l">
+              <a:spcBef>
+                <a:spcPts val="0"/>
+              </a:spcBef>
+              <a:spcAft>
+                <a:spcPts val="0"/>
+              </a:spcAft>
+            </a:pPr>
+            <a:r>
+              <a:rPr sz="1250" b="1" lang="zh-CN" altLang="zh-CN">
                 <a:solidFill>
                   <a:srgbClr val="14213D"/>
                 </a:solidFill>
@@ -4192,9 +4353,16 @@
           </a:bodyPr>
           <a:lstStyle/>
           <a:p>
-            <a:pPr algn="l"/>
-            <a:r>
-              <a:rPr sz="1000" b="0">
+            <a:pPr algn="l">
+              <a:spcBef>
+                <a:spcPts val="0"/>
+              </a:spcBef>
+              <a:spcAft>
+                <a:spcPts val="0"/>
+              </a:spcAft>
+            </a:pPr>
+            <a:r>
+              <a:rPr sz="1000" b="0" lang="zh-CN" altLang="zh-CN">
                 <a:solidFill>
                   <a:srgbClr val="14213D"/>
                 </a:solidFill>
@@ -4229,9 +4397,16 @@
           </a:bodyPr>
           <a:lstStyle/>
           <a:p>
-            <a:pPr algn="ctr"/>
-            <a:r>
-              <a:rPr sz="1000" b="1">
+            <a:pPr algn="ctr">
+              <a:spcBef>
+                <a:spcPts val="0"/>
+              </a:spcBef>
+              <a:spcAft>
+                <a:spcPts val="0"/>
+              </a:spcAft>
+            </a:pPr>
+            <a:r>
+              <a:rPr sz="1000" b="1" lang="zh-CN" altLang="zh-CN">
                 <a:solidFill>
                   <a:srgbClr val="008C95"/>
                 </a:solidFill>
@@ -4285,7 +4460,14 @@
           <a:bodyPr rtlCol="0" anchor="ctr"/>
           <a:lstStyle/>
           <a:p>
-            <a:pPr algn="ctr"/>
+            <a:pPr algn="ctr">
+              <a:spcBef>
+                <a:spcPts val="0"/>
+              </a:spcBef>
+              <a:spcAft>
+                <a:spcPts val="0"/>
+              </a:spcAft>
+            </a:pPr>
           </a:p>
         </p:txBody>
       </p:sp>
@@ -4330,7 +4512,14 @@
           <a:bodyPr rtlCol="0" anchor="ctr"/>
           <a:lstStyle/>
           <a:p>
-            <a:pPr algn="ctr"/>
+            <a:pPr algn="ctr">
+              <a:spcBef>
+                <a:spcPts val="0"/>
+              </a:spcBef>
+              <a:spcAft>
+                <a:spcPts val="0"/>
+              </a:spcAft>
+            </a:pPr>
           </a:p>
         </p:txBody>
       </p:sp>
@@ -4426,9 +4615,16 @@
           </a:bodyPr>
           <a:lstStyle/>
           <a:p>
-            <a:pPr algn="l"/>
-            <a:r>
-              <a:rPr sz="1450" b="1">
+            <a:pPr algn="l">
+              <a:spcBef>
+                <a:spcPts val="0"/>
+              </a:spcBef>
+              <a:spcAft>
+                <a:spcPts val="0"/>
+              </a:spcAft>
+            </a:pPr>
+            <a:r>
+              <a:rPr sz="1450" b="1" lang="zh-CN" altLang="zh-CN">
                 <a:solidFill>
                   <a:srgbClr val="0B3D91"/>
                 </a:solidFill>
@@ -4463,9 +4659,16 @@
           </a:bodyPr>
           <a:lstStyle/>
           <a:p>
-            <a:pPr algn="l"/>
-            <a:r>
-              <a:rPr sz="980" b="0">
+            <a:pPr algn="l">
+              <a:spcBef>
+                <a:spcPts val="0"/>
+              </a:spcBef>
+              <a:spcAft>
+                <a:spcPts val="0"/>
+              </a:spcAft>
+            </a:pPr>
+            <a:r>
+              <a:rPr sz="980" b="0" lang="zh-CN" altLang="zh-CN">
                 <a:solidFill>
                   <a:srgbClr val="14213D"/>
                 </a:solidFill>
@@ -4519,7 +4722,14 @@
           <a:bodyPr rtlCol="0" anchor="ctr"/>
           <a:lstStyle/>
           <a:p>
-            <a:pPr algn="ctr"/>
+            <a:pPr algn="ctr">
+              <a:spcBef>
+                <a:spcPts val="0"/>
+              </a:spcBef>
+              <a:spcAft>
+                <a:spcPts val="0"/>
+              </a:spcAft>
+            </a:pPr>
           </a:p>
         </p:txBody>
       </p:sp>
@@ -4531,8 +4741,8 @@
         </p:nvSpPr>
         <p:spPr>
           <a:xfrm>
-            <a:off x="2476500" y="3086100"/>
-            <a:ext cx="1873250" cy="165100"/>
+            <a:off x="2476500" y="3062287"/>
+            <a:ext cx="1873250" cy="212725"/>
           </a:xfrm>
           <a:prstGeom prst="rect">
             <a:avLst/>
@@ -4545,9 +4755,16 @@
           </a:bodyPr>
           <a:lstStyle/>
           <a:p>
-            <a:pPr algn="l"/>
-            <a:r>
-              <a:rPr sz="1250" b="1">
+            <a:pPr algn="l">
+              <a:spcBef>
+                <a:spcPts val="0"/>
+              </a:spcBef>
+              <a:spcAft>
+                <a:spcPts val="0"/>
+              </a:spcAft>
+            </a:pPr>
+            <a:r>
+              <a:rPr sz="1250" b="1" lang="zh-CN" altLang="zh-CN">
                 <a:solidFill>
                   <a:srgbClr val="14213D"/>
                 </a:solidFill>
@@ -4582,9 +4799,16 @@
           </a:bodyPr>
           <a:lstStyle/>
           <a:p>
-            <a:pPr algn="l"/>
-            <a:r>
-              <a:rPr sz="1000" b="0">
+            <a:pPr algn="l">
+              <a:spcBef>
+                <a:spcPts val="0"/>
+              </a:spcBef>
+              <a:spcAft>
+                <a:spcPts val="0"/>
+              </a:spcAft>
+            </a:pPr>
+            <a:r>
+              <a:rPr sz="1000" b="0" lang="zh-CN" altLang="zh-CN">
                 <a:solidFill>
                   <a:srgbClr val="14213D"/>
                 </a:solidFill>
@@ -4619,9 +4843,16 @@
           </a:bodyPr>
           <a:lstStyle/>
           <a:p>
-            <a:pPr algn="ctr"/>
-            <a:r>
-              <a:rPr sz="1000" b="1">
+            <a:pPr algn="ctr">
+              <a:spcBef>
+                <a:spcPts val="0"/>
+              </a:spcBef>
+              <a:spcAft>
+                <a:spcPts val="0"/>
+              </a:spcAft>
+            </a:pPr>
+            <a:r>
+              <a:rPr sz="1000" b="1" lang="zh-CN" altLang="zh-CN">
                 <a:solidFill>
                   <a:srgbClr val="008C95"/>
                 </a:solidFill>
@@ -4675,7 +4906,14 @@
           <a:bodyPr rtlCol="0" anchor="ctr"/>
           <a:lstStyle/>
           <a:p>
-            <a:pPr algn="ctr"/>
+            <a:pPr algn="ctr">
+              <a:spcBef>
+                <a:spcPts val="0"/>
+              </a:spcBef>
+              <a:spcAft>
+                <a:spcPts val="0"/>
+              </a:spcAft>
+            </a:pPr>
           </a:p>
         </p:txBody>
       </p:sp>
@@ -4687,8 +4925,8 @@
         </p:nvSpPr>
         <p:spPr>
           <a:xfrm>
-            <a:off x="4730750" y="3086100"/>
-            <a:ext cx="1873250" cy="165100"/>
+            <a:off x="4730750" y="3062287"/>
+            <a:ext cx="1873250" cy="212725"/>
           </a:xfrm>
           <a:prstGeom prst="rect">
             <a:avLst/>
@@ -4701,9 +4939,16 @@
           </a:bodyPr>
           <a:lstStyle/>
           <a:p>
-            <a:pPr algn="l"/>
-            <a:r>
-              <a:rPr sz="1250" b="1">
+            <a:pPr algn="l">
+              <a:spcBef>
+                <a:spcPts val="0"/>
+              </a:spcBef>
+              <a:spcAft>
+                <a:spcPts val="0"/>
+              </a:spcAft>
+            </a:pPr>
+            <a:r>
+              <a:rPr sz="1250" b="1" lang="zh-CN" altLang="zh-CN">
                 <a:solidFill>
                   <a:srgbClr val="14213D"/>
                 </a:solidFill>
@@ -4738,9 +4983,16 @@
           </a:bodyPr>
           <a:lstStyle/>
           <a:p>
-            <a:pPr algn="l"/>
-            <a:r>
-              <a:rPr sz="1000" b="0">
+            <a:pPr algn="l">
+              <a:spcBef>
+                <a:spcPts val="0"/>
+              </a:spcBef>
+              <a:spcAft>
+                <a:spcPts val="0"/>
+              </a:spcAft>
+            </a:pPr>
+            <a:r>
+              <a:rPr sz="1000" b="0" lang="zh-CN" altLang="zh-CN">
                 <a:solidFill>
                   <a:srgbClr val="14213D"/>
                 </a:solidFill>
@@ -4775,9 +5027,16 @@
           </a:bodyPr>
           <a:lstStyle/>
           <a:p>
-            <a:pPr algn="ctr"/>
-            <a:r>
-              <a:rPr sz="1000" b="1">
+            <a:pPr algn="ctr">
+              <a:spcBef>
+                <a:spcPts val="0"/>
+              </a:spcBef>
+              <a:spcAft>
+                <a:spcPts val="0"/>
+              </a:spcAft>
+            </a:pPr>
+            <a:r>
+              <a:rPr sz="1000" b="1" lang="zh-CN" altLang="zh-CN">
                 <a:solidFill>
                   <a:srgbClr val="F97316"/>
                 </a:solidFill>
@@ -4831,7 +5090,14 @@
           <a:bodyPr rtlCol="0" anchor="ctr"/>
           <a:lstStyle/>
           <a:p>
-            <a:pPr algn="ctr"/>
+            <a:pPr algn="ctr">
+              <a:spcBef>
+                <a:spcPts val="0"/>
+              </a:spcBef>
+              <a:spcAft>
+                <a:spcPts val="0"/>
+              </a:spcAft>
+            </a:pPr>
           </a:p>
         </p:txBody>
       </p:sp>
@@ -4843,8 +5109,8 @@
         </p:nvSpPr>
         <p:spPr>
           <a:xfrm>
-            <a:off x="6985000" y="3086100"/>
-            <a:ext cx="1873250" cy="165100"/>
+            <a:off x="6985000" y="3062287"/>
+            <a:ext cx="1873250" cy="212725"/>
           </a:xfrm>
           <a:prstGeom prst="rect">
             <a:avLst/>
@@ -4857,9 +5123,16 @@
           </a:bodyPr>
           <a:lstStyle/>
           <a:p>
-            <a:pPr algn="l"/>
-            <a:r>
-              <a:rPr sz="1250" b="1">
+            <a:pPr algn="l">
+              <a:spcBef>
+                <a:spcPts val="0"/>
+              </a:spcBef>
+              <a:spcAft>
+                <a:spcPts val="0"/>
+              </a:spcAft>
+            </a:pPr>
+            <a:r>
+              <a:rPr sz="1250" b="1" lang="zh-CN" altLang="zh-CN">
                 <a:solidFill>
                   <a:srgbClr val="14213D"/>
                 </a:solidFill>
@@ -4894,9 +5167,16 @@
           </a:bodyPr>
           <a:lstStyle/>
           <a:p>
-            <a:pPr algn="l"/>
-            <a:r>
-              <a:rPr sz="1000" b="0">
+            <a:pPr algn="l">
+              <a:spcBef>
+                <a:spcPts val="0"/>
+              </a:spcBef>
+              <a:spcAft>
+                <a:spcPts val="0"/>
+              </a:spcAft>
+            </a:pPr>
+            <a:r>
+              <a:rPr sz="1000" b="0" lang="zh-CN" altLang="zh-CN">
                 <a:solidFill>
                   <a:srgbClr val="14213D"/>
                 </a:solidFill>
@@ -4931,9 +5211,16 @@
           </a:bodyPr>
           <a:lstStyle/>
           <a:p>
-            <a:pPr algn="ctr"/>
-            <a:r>
-              <a:rPr sz="1000" b="1">
+            <a:pPr algn="ctr">
+              <a:spcBef>
+                <a:spcPts val="0"/>
+              </a:spcBef>
+              <a:spcAft>
+                <a:spcPts val="0"/>
+              </a:spcAft>
+            </a:pPr>
+            <a:r>
+              <a:rPr sz="1000" b="1" lang="zh-CN" altLang="zh-CN">
                 <a:solidFill>
                   <a:srgbClr val="008C95"/>
                 </a:solidFill>
@@ -4987,7 +5274,14 @@
           <a:bodyPr rtlCol="0" anchor="ctr"/>
           <a:lstStyle/>
           <a:p>
-            <a:pPr algn="ctr"/>
+            <a:pPr algn="ctr">
+              <a:spcBef>
+                <a:spcPts val="0"/>
+              </a:spcBef>
+              <a:spcAft>
+                <a:spcPts val="0"/>
+              </a:spcAft>
+            </a:pPr>
           </a:p>
         </p:txBody>
       </p:sp>
@@ -5032,7 +5326,14 @@
           <a:bodyPr rtlCol="0" anchor="ctr"/>
           <a:lstStyle/>
           <a:p>
-            <a:pPr algn="ctr"/>
+            <a:pPr algn="ctr">
+              <a:spcBef>
+                <a:spcPts val="0"/>
+              </a:spcBef>
+              <a:spcAft>
+                <a:spcPts val="0"/>
+              </a:spcAft>
+            </a:pPr>
           </a:p>
         </p:txBody>
       </p:sp>
@@ -5128,9 +5429,16 @@
           </a:bodyPr>
           <a:lstStyle/>
           <a:p>
-            <a:pPr algn="l"/>
-            <a:r>
-              <a:rPr sz="1450" b="1">
+            <a:pPr algn="l">
+              <a:spcBef>
+                <a:spcPts val="0"/>
+              </a:spcBef>
+              <a:spcAft>
+                <a:spcPts val="0"/>
+              </a:spcAft>
+            </a:pPr>
+            <a:r>
+              <a:rPr sz="1450" b="1" lang="zh-CN" altLang="zh-CN">
                 <a:solidFill>
                   <a:srgbClr val="0B3D91"/>
                 </a:solidFill>
@@ -5165,9 +5473,16 @@
           </a:bodyPr>
           <a:lstStyle/>
           <a:p>
-            <a:pPr algn="l"/>
-            <a:r>
-              <a:rPr sz="980" b="0">
+            <a:pPr algn="l">
+              <a:spcBef>
+                <a:spcPts val="0"/>
+              </a:spcBef>
+              <a:spcAft>
+                <a:spcPts val="0"/>
+              </a:spcAft>
+            </a:pPr>
+            <a:r>
+              <a:rPr sz="980" b="0" lang="zh-CN" altLang="zh-CN">
                 <a:solidFill>
                   <a:srgbClr val="14213D"/>
                 </a:solidFill>
@@ -5221,7 +5536,14 @@
           <a:bodyPr rtlCol="0" anchor="ctr"/>
           <a:lstStyle/>
           <a:p>
-            <a:pPr algn="ctr"/>
+            <a:pPr algn="ctr">
+              <a:spcBef>
+                <a:spcPts val="0"/>
+              </a:spcBef>
+              <a:spcAft>
+                <a:spcPts val="0"/>
+              </a:spcAft>
+            </a:pPr>
           </a:p>
         </p:txBody>
       </p:sp>
@@ -5233,8 +5555,8 @@
         </p:nvSpPr>
         <p:spPr>
           <a:xfrm>
-            <a:off x="2476500" y="4140200"/>
-            <a:ext cx="1873250" cy="165100"/>
+            <a:off x="2476500" y="4116387"/>
+            <a:ext cx="1873250" cy="212725"/>
           </a:xfrm>
           <a:prstGeom prst="rect">
             <a:avLst/>
@@ -5247,9 +5569,16 @@
           </a:bodyPr>
           <a:lstStyle/>
           <a:p>
-            <a:pPr algn="l"/>
-            <a:r>
-              <a:rPr sz="1250" b="1">
+            <a:pPr algn="l">
+              <a:spcBef>
+                <a:spcPts val="0"/>
+              </a:spcBef>
+              <a:spcAft>
+                <a:spcPts val="0"/>
+              </a:spcAft>
+            </a:pPr>
+            <a:r>
+              <a:rPr sz="1250" b="1" lang="zh-CN" altLang="zh-CN">
                 <a:solidFill>
                   <a:srgbClr val="14213D"/>
                 </a:solidFill>
@@ -5284,9 +5613,16 @@
           </a:bodyPr>
           <a:lstStyle/>
           <a:p>
-            <a:pPr algn="l"/>
-            <a:r>
-              <a:rPr sz="1000" b="0">
+            <a:pPr algn="l">
+              <a:spcBef>
+                <a:spcPts val="0"/>
+              </a:spcBef>
+              <a:spcAft>
+                <a:spcPts val="0"/>
+              </a:spcAft>
+            </a:pPr>
+            <a:r>
+              <a:rPr sz="1000" b="0" lang="zh-CN" altLang="zh-CN">
                 <a:solidFill>
                   <a:srgbClr val="14213D"/>
                 </a:solidFill>
@@ -5321,9 +5657,16 @@
           </a:bodyPr>
           <a:lstStyle/>
           <a:p>
-            <a:pPr algn="ctr"/>
-            <a:r>
-              <a:rPr sz="1000" b="1">
+            <a:pPr algn="ctr">
+              <a:spcBef>
+                <a:spcPts val="0"/>
+              </a:spcBef>
+              <a:spcAft>
+                <a:spcPts val="0"/>
+              </a:spcAft>
+            </a:pPr>
+            <a:r>
+              <a:rPr sz="1000" b="1" lang="zh-CN" altLang="zh-CN">
                 <a:solidFill>
                   <a:srgbClr val="008C95"/>
                 </a:solidFill>
@@ -5377,7 +5720,14 @@
           <a:bodyPr rtlCol="0" anchor="ctr"/>
           <a:lstStyle/>
           <a:p>
-            <a:pPr algn="ctr"/>
+            <a:pPr algn="ctr">
+              <a:spcBef>
+                <a:spcPts val="0"/>
+              </a:spcBef>
+              <a:spcAft>
+                <a:spcPts val="0"/>
+              </a:spcAft>
+            </a:pPr>
           </a:p>
         </p:txBody>
       </p:sp>
@@ -5389,8 +5739,8 @@
         </p:nvSpPr>
         <p:spPr>
           <a:xfrm>
-            <a:off x="4730750" y="4140200"/>
-            <a:ext cx="1873250" cy="165100"/>
+            <a:off x="4730750" y="4116387"/>
+            <a:ext cx="1873250" cy="212725"/>
           </a:xfrm>
           <a:prstGeom prst="rect">
             <a:avLst/>
@@ -5403,9 +5753,16 @@
           </a:bodyPr>
           <a:lstStyle/>
           <a:p>
-            <a:pPr algn="l"/>
-            <a:r>
-              <a:rPr sz="1250" b="1">
+            <a:pPr algn="l">
+              <a:spcBef>
+                <a:spcPts val="0"/>
+              </a:spcBef>
+              <a:spcAft>
+                <a:spcPts val="0"/>
+              </a:spcAft>
+            </a:pPr>
+            <a:r>
+              <a:rPr sz="1250" b="1" lang="zh-CN" altLang="zh-CN">
                 <a:solidFill>
                   <a:srgbClr val="14213D"/>
                 </a:solidFill>
@@ -5440,9 +5797,16 @@
           </a:bodyPr>
           <a:lstStyle/>
           <a:p>
-            <a:pPr algn="l"/>
-            <a:r>
-              <a:rPr sz="1000" b="0">
+            <a:pPr algn="l">
+              <a:spcBef>
+                <a:spcPts val="0"/>
+              </a:spcBef>
+              <a:spcAft>
+                <a:spcPts val="0"/>
+              </a:spcAft>
+            </a:pPr>
+            <a:r>
+              <a:rPr sz="1000" b="0" lang="zh-CN" altLang="zh-CN">
                 <a:solidFill>
                   <a:srgbClr val="14213D"/>
                 </a:solidFill>
@@ -5477,9 +5841,16 @@
           </a:bodyPr>
           <a:lstStyle/>
           <a:p>
-            <a:pPr algn="ctr"/>
-            <a:r>
-              <a:rPr sz="1000" b="1">
+            <a:pPr algn="ctr">
+              <a:spcBef>
+                <a:spcPts val="0"/>
+              </a:spcBef>
+              <a:spcAft>
+                <a:spcPts val="0"/>
+              </a:spcAft>
+            </a:pPr>
+            <a:r>
+              <a:rPr sz="1000" b="1" lang="zh-CN" altLang="zh-CN">
                 <a:solidFill>
                   <a:srgbClr val="F97316"/>
                 </a:solidFill>
@@ -5533,7 +5904,14 @@
           <a:bodyPr rtlCol="0" anchor="ctr"/>
           <a:lstStyle/>
           <a:p>
-            <a:pPr algn="ctr"/>
+            <a:pPr algn="ctr">
+              <a:spcBef>
+                <a:spcPts val="0"/>
+              </a:spcBef>
+              <a:spcAft>
+                <a:spcPts val="0"/>
+              </a:spcAft>
+            </a:pPr>
           </a:p>
         </p:txBody>
       </p:sp>
@@ -5545,8 +5923,8 @@
         </p:nvSpPr>
         <p:spPr>
           <a:xfrm>
-            <a:off x="6985000" y="4140200"/>
-            <a:ext cx="1873250" cy="165100"/>
+            <a:off x="6985000" y="4116387"/>
+            <a:ext cx="1873250" cy="212725"/>
           </a:xfrm>
           <a:prstGeom prst="rect">
             <a:avLst/>
@@ -5559,9 +5937,16 @@
           </a:bodyPr>
           <a:lstStyle/>
           <a:p>
-            <a:pPr algn="l"/>
-            <a:r>
-              <a:rPr sz="1250" b="1">
+            <a:pPr algn="l">
+              <a:spcBef>
+                <a:spcPts val="0"/>
+              </a:spcBef>
+              <a:spcAft>
+                <a:spcPts val="0"/>
+              </a:spcAft>
+            </a:pPr>
+            <a:r>
+              <a:rPr sz="1250" b="1" lang="zh-CN" altLang="zh-CN">
                 <a:solidFill>
                   <a:srgbClr val="14213D"/>
                 </a:solidFill>
@@ -5596,9 +5981,16 @@
           </a:bodyPr>
           <a:lstStyle/>
           <a:p>
-            <a:pPr algn="l"/>
-            <a:r>
-              <a:rPr sz="1000" b="0">
+            <a:pPr algn="l">
+              <a:spcBef>
+                <a:spcPts val="0"/>
+              </a:spcBef>
+              <a:spcAft>
+                <a:spcPts val="0"/>
+              </a:spcAft>
+            </a:pPr>
+            <a:r>
+              <a:rPr sz="1000" b="0" lang="zh-CN" altLang="zh-CN">
                 <a:solidFill>
                   <a:srgbClr val="14213D"/>
                 </a:solidFill>
@@ -5633,9 +6025,16 @@
           </a:bodyPr>
           <a:lstStyle/>
           <a:p>
-            <a:pPr algn="ctr"/>
-            <a:r>
-              <a:rPr sz="1000" b="1">
+            <a:pPr algn="ctr">
+              <a:spcBef>
+                <a:spcPts val="0"/>
+              </a:spcBef>
+              <a:spcAft>
+                <a:spcPts val="0"/>
+              </a:spcAft>
+            </a:pPr>
+            <a:r>
+              <a:rPr sz="1000" b="1" lang="zh-CN" altLang="zh-CN">
                 <a:solidFill>
                   <a:srgbClr val="008C95"/>
                 </a:solidFill>
@@ -5689,7 +6088,14 @@
           <a:bodyPr rtlCol="0" anchor="ctr"/>
           <a:lstStyle/>
           <a:p>
-            <a:pPr algn="ctr"/>
+            <a:pPr algn="ctr">
+              <a:spcBef>
+                <a:spcPts val="0"/>
+              </a:spcBef>
+              <a:spcAft>
+                <a:spcPts val="0"/>
+              </a:spcAft>
+            </a:pPr>
           </a:p>
         </p:txBody>
       </p:sp>
@@ -5701,8 +6107,8 @@
         </p:nvSpPr>
         <p:spPr>
           <a:xfrm>
-            <a:off x="10045700" y="2044700"/>
-            <a:ext cx="1460500" cy="215900"/>
+            <a:off x="10045700" y="1996757"/>
+            <a:ext cx="1460500" cy="311785"/>
           </a:xfrm>
           <a:prstGeom prst="rect">
             <a:avLst/>
@@ -5715,9 +6121,16 @@
           </a:bodyPr>
           <a:lstStyle/>
           <a:p>
-            <a:pPr algn="l"/>
-            <a:r>
-              <a:rPr sz="1900" b="1">
+            <a:pPr algn="l">
+              <a:spcBef>
+                <a:spcPts val="0"/>
+              </a:spcBef>
+              <a:spcAft>
+                <a:spcPts val="0"/>
+              </a:spcAft>
+            </a:pPr>
+            <a:r>
+              <a:rPr sz="1900" b="1" lang="zh-CN" altLang="zh-CN">
                 <a:solidFill>
                   <a:srgbClr val="008C95"/>
                 </a:solidFill>
@@ -5771,7 +6184,14 @@
           <a:bodyPr rtlCol="0" anchor="ctr"/>
           <a:lstStyle/>
           <a:p>
-            <a:pPr algn="ctr"/>
+            <a:pPr algn="ctr">
+              <a:spcBef>
+                <a:spcPts val="0"/>
+              </a:spcBef>
+              <a:spcAft>
+                <a:spcPts val="0"/>
+              </a:spcAft>
+            </a:pPr>
           </a:p>
         </p:txBody>
       </p:sp>
@@ -5867,9 +6287,16 @@
           </a:bodyPr>
           <a:lstStyle/>
           <a:p>
-            <a:pPr algn="l"/>
-            <a:r>
-              <a:rPr sz="1100" b="0">
+            <a:pPr algn="l">
+              <a:spcBef>
+                <a:spcPts val="0"/>
+              </a:spcBef>
+              <a:spcAft>
+                <a:spcPts val="0"/>
+              </a:spcAft>
+            </a:pPr>
+            <a:r>
+              <a:rPr sz="1100" b="0" lang="zh-CN" altLang="zh-CN">
                 <a:solidFill>
                   <a:srgbClr val="14213D"/>
                 </a:solidFill>
@@ -5923,7 +6350,14 @@
           <a:bodyPr rtlCol="0" anchor="ctr"/>
           <a:lstStyle/>
           <a:p>
-            <a:pPr algn="ctr"/>
+            <a:pPr algn="ctr">
+              <a:spcBef>
+                <a:spcPts val="0"/>
+              </a:spcBef>
+              <a:spcAft>
+                <a:spcPts val="0"/>
+              </a:spcAft>
+            </a:pPr>
           </a:p>
         </p:txBody>
       </p:sp>
@@ -6019,9 +6453,16 @@
           </a:bodyPr>
           <a:lstStyle/>
           <a:p>
-            <a:pPr algn="l"/>
-            <a:r>
-              <a:rPr sz="1100" b="0">
+            <a:pPr algn="l">
+              <a:spcBef>
+                <a:spcPts val="0"/>
+              </a:spcBef>
+              <a:spcAft>
+                <a:spcPts val="0"/>
+              </a:spcAft>
+            </a:pPr>
+            <a:r>
+              <a:rPr sz="1100" b="0" lang="zh-CN" altLang="zh-CN">
                 <a:solidFill>
                   <a:srgbClr val="14213D"/>
                 </a:solidFill>
@@ -6075,7 +6516,14 @@
           <a:bodyPr rtlCol="0" anchor="ctr"/>
           <a:lstStyle/>
           <a:p>
-            <a:pPr algn="ctr"/>
+            <a:pPr algn="ctr">
+              <a:spcBef>
+                <a:spcPts val="0"/>
+              </a:spcBef>
+              <a:spcAft>
+                <a:spcPts val="0"/>
+              </a:spcAft>
+            </a:pPr>
           </a:p>
         </p:txBody>
       </p:sp>
@@ -6171,9 +6619,16 @@
           </a:bodyPr>
           <a:lstStyle/>
           <a:p>
-            <a:pPr algn="l"/>
-            <a:r>
-              <a:rPr sz="1100" b="0">
+            <a:pPr algn="l">
+              <a:spcBef>
+                <a:spcPts val="0"/>
+              </a:spcBef>
+              <a:spcAft>
+                <a:spcPts val="0"/>
+              </a:spcAft>
+            </a:pPr>
+            <a:r>
+              <a:rPr sz="1100" b="0" lang="zh-CN" altLang="zh-CN">
                 <a:solidFill>
                   <a:srgbClr val="14213D"/>
                 </a:solidFill>
@@ -6227,7 +6682,14 @@
           <a:bodyPr rtlCol="0" anchor="ctr"/>
           <a:lstStyle/>
           <a:p>
-            <a:pPr algn="ctr"/>
+            <a:pPr algn="ctr">
+              <a:spcBef>
+                <a:spcPts val="0"/>
+              </a:spcBef>
+              <a:spcAft>
+                <a:spcPts val="0"/>
+              </a:spcAft>
+            </a:pPr>
           </a:p>
         </p:txBody>
       </p:sp>
@@ -6323,9 +6785,16 @@
           </a:bodyPr>
           <a:lstStyle/>
           <a:p>
-            <a:pPr algn="l"/>
-            <a:r>
-              <a:rPr sz="1100" b="0">
+            <a:pPr algn="l">
+              <a:spcBef>
+                <a:spcPts val="0"/>
+              </a:spcBef>
+              <a:spcAft>
+                <a:spcPts val="0"/>
+              </a:spcAft>
+            </a:pPr>
+            <a:r>
+              <a:rPr sz="1100" b="0" lang="zh-CN" altLang="zh-CN">
                 <a:solidFill>
                   <a:srgbClr val="14213D"/>
                 </a:solidFill>
@@ -6379,7 +6848,14 @@
           <a:bodyPr rtlCol="0" anchor="ctr"/>
           <a:lstStyle/>
           <a:p>
-            <a:pPr algn="ctr"/>
+            <a:pPr algn="ctr">
+              <a:spcBef>
+                <a:spcPts val="0"/>
+              </a:spcBef>
+              <a:spcAft>
+                <a:spcPts val="0"/>
+              </a:spcAft>
+            </a:pPr>
           </a:p>
         </p:txBody>
       </p:sp>
@@ -6424,7 +6900,14 @@
           <a:bodyPr rtlCol="0" anchor="ctr"/>
           <a:lstStyle/>
           <a:p>
-            <a:pPr algn="ctr"/>
+            <a:pPr algn="ctr">
+              <a:spcBef>
+                <a:spcPts val="0"/>
+              </a:spcBef>
+              <a:spcAft>
+                <a:spcPts val="0"/>
+              </a:spcAft>
+            </a:pPr>
           </a:p>
         </p:txBody>
       </p:sp>
@@ -6506,8 +6989,8 @@
         </p:nvSpPr>
         <p:spPr>
           <a:xfrm>
-            <a:off x="1079500" y="5397500"/>
-            <a:ext cx="1460500" cy="190500"/>
+            <a:off x="1079500" y="5367337"/>
+            <a:ext cx="1460500" cy="250825"/>
           </a:xfrm>
           <a:prstGeom prst="rect">
             <a:avLst/>
@@ -6520,9 +7003,16 @@
           </a:bodyPr>
           <a:lstStyle/>
           <a:p>
-            <a:pPr algn="l"/>
-            <a:r>
-              <a:rPr sz="1500" b="1">
+            <a:pPr algn="l">
+              <a:spcBef>
+                <a:spcPts val="0"/>
+              </a:spcBef>
+              <a:spcAft>
+                <a:spcPts val="0"/>
+              </a:spcAft>
+            </a:pPr>
+            <a:r>
+              <a:rPr sz="1500" b="1" lang="zh-CN" altLang="zh-CN">
                 <a:solidFill>
                   <a:srgbClr val="008C95"/>
                 </a:solidFill>
@@ -6543,8 +7033,8 @@
         </p:nvSpPr>
         <p:spPr>
           <a:xfrm>
-            <a:off x="1079500" y="5651500"/>
-            <a:ext cx="952500" cy="177800"/>
+            <a:off x="1079500" y="5614987"/>
+            <a:ext cx="952500" cy="250825"/>
           </a:xfrm>
           <a:prstGeom prst="rect">
             <a:avLst/>
@@ -6557,9 +7047,16 @@
           </a:bodyPr>
           <a:lstStyle/>
           <a:p>
-            <a:pPr algn="l"/>
-            <a:r>
-              <a:rPr sz="1500" b="1">
+            <a:pPr algn="l">
+              <a:spcBef>
+                <a:spcPts val="0"/>
+              </a:spcBef>
+              <a:spcAft>
+                <a:spcPts val="0"/>
+              </a:spcAft>
+            </a:pPr>
+            <a:r>
+              <a:rPr sz="1500" b="1" lang="zh-CN" altLang="zh-CN">
                 <a:solidFill>
                   <a:srgbClr val="008C95"/>
                 </a:solidFill>
@@ -6594,9 +7091,16 @@
           </a:bodyPr>
           <a:lstStyle/>
           <a:p>
-            <a:pPr algn="l"/>
-            <a:r>
-              <a:rPr sz="1000" b="0">
+            <a:pPr algn="l">
+              <a:spcBef>
+                <a:spcPts val="0"/>
+              </a:spcBef>
+              <a:spcAft>
+                <a:spcPts val="0"/>
+              </a:spcAft>
+            </a:pPr>
+            <a:r>
+              <a:rPr sz="1000" b="0" lang="zh-CN" altLang="zh-CN">
                 <a:solidFill>
                   <a:srgbClr val="14213D"/>
                 </a:solidFill>
@@ -6650,7 +7154,14 @@
           <a:bodyPr rtlCol="0" anchor="ctr"/>
           <a:lstStyle/>
           <a:p>
-            <a:pPr algn="ctr"/>
+            <a:pPr algn="ctr">
+              <a:spcBef>
+                <a:spcPts val="0"/>
+              </a:spcBef>
+              <a:spcAft>
+                <a:spcPts val="0"/>
+              </a:spcAft>
+            </a:pPr>
           </a:p>
         </p:txBody>
       </p:sp>
@@ -6732,8 +7243,8 @@
         </p:nvSpPr>
         <p:spPr>
           <a:xfrm>
-            <a:off x="3886200" y="5397500"/>
-            <a:ext cx="1460500" cy="190500"/>
+            <a:off x="3886200" y="5367337"/>
+            <a:ext cx="1460500" cy="250825"/>
           </a:xfrm>
           <a:prstGeom prst="rect">
             <a:avLst/>
@@ -6746,9 +7257,16 @@
           </a:bodyPr>
           <a:lstStyle/>
           <a:p>
-            <a:pPr algn="l"/>
-            <a:r>
-              <a:rPr sz="1500" b="1">
+            <a:pPr algn="l">
+              <a:spcBef>
+                <a:spcPts val="0"/>
+              </a:spcBef>
+              <a:spcAft>
+                <a:spcPts val="0"/>
+              </a:spcAft>
+            </a:pPr>
+            <a:r>
+              <a:rPr sz="1500" b="1" lang="zh-CN" altLang="zh-CN">
                 <a:solidFill>
                   <a:srgbClr val="0B3D91"/>
                 </a:solidFill>
@@ -6769,8 +7287,8 @@
         </p:nvSpPr>
         <p:spPr>
           <a:xfrm>
-            <a:off x="3886200" y="5651500"/>
-            <a:ext cx="952500" cy="177800"/>
+            <a:off x="3886200" y="5614987"/>
+            <a:ext cx="952500" cy="250825"/>
           </a:xfrm>
           <a:prstGeom prst="rect">
             <a:avLst/>
@@ -6783,9 +7301,16 @@
           </a:bodyPr>
           <a:lstStyle/>
           <a:p>
-            <a:pPr algn="l"/>
-            <a:r>
-              <a:rPr sz="1500" b="1">
+            <a:pPr algn="l">
+              <a:spcBef>
+                <a:spcPts val="0"/>
+              </a:spcBef>
+              <a:spcAft>
+                <a:spcPts val="0"/>
+              </a:spcAft>
+            </a:pPr>
+            <a:r>
+              <a:rPr sz="1500" b="1" lang="zh-CN" altLang="zh-CN">
                 <a:solidFill>
                   <a:srgbClr val="0B3D91"/>
                 </a:solidFill>
@@ -6820,9 +7345,16 @@
           </a:bodyPr>
           <a:lstStyle/>
           <a:p>
-            <a:pPr algn="l"/>
-            <a:r>
-              <a:rPr sz="1000" b="0">
+            <a:pPr algn="l">
+              <a:spcBef>
+                <a:spcPts val="0"/>
+              </a:spcBef>
+              <a:spcAft>
+                <a:spcPts val="0"/>
+              </a:spcAft>
+            </a:pPr>
+            <a:r>
+              <a:rPr sz="1000" b="0" lang="zh-CN" altLang="zh-CN">
                 <a:solidFill>
                   <a:srgbClr val="14213D"/>
                 </a:solidFill>
@@ -6911,7 +7443,14 @@
           <a:bodyPr rtlCol="0" anchor="ctr"/>
           <a:lstStyle/>
           <a:p>
-            <a:pPr algn="ctr"/>
+            <a:pPr algn="ctr">
+              <a:spcBef>
+                <a:spcPts val="0"/>
+              </a:spcBef>
+              <a:spcAft>
+                <a:spcPts val="0"/>
+              </a:spcAft>
+            </a:pPr>
           </a:p>
         </p:txBody>
       </p:sp>
@@ -6993,8 +7532,8 @@
         </p:nvSpPr>
         <p:spPr>
           <a:xfrm>
-            <a:off x="6692900" y="5397500"/>
-            <a:ext cx="1460500" cy="190500"/>
+            <a:off x="6692900" y="5367337"/>
+            <a:ext cx="1460500" cy="250825"/>
           </a:xfrm>
           <a:prstGeom prst="rect">
             <a:avLst/>
@@ -7007,9 +7546,16 @@
           </a:bodyPr>
           <a:lstStyle/>
           <a:p>
-            <a:pPr algn="l"/>
-            <a:r>
-              <a:rPr sz="1500" b="1">
+            <a:pPr algn="l">
+              <a:spcBef>
+                <a:spcPts val="0"/>
+              </a:spcBef>
+              <a:spcAft>
+                <a:spcPts val="0"/>
+              </a:spcAft>
+            </a:pPr>
+            <a:r>
+              <a:rPr sz="1500" b="1" lang="zh-CN" altLang="zh-CN">
                 <a:solidFill>
                   <a:srgbClr val="008C95"/>
                 </a:solidFill>
@@ -7030,8 +7576,8 @@
         </p:nvSpPr>
         <p:spPr>
           <a:xfrm>
-            <a:off x="6692900" y="5651500"/>
-            <a:ext cx="952500" cy="177800"/>
+            <a:off x="6692900" y="5614987"/>
+            <a:ext cx="952500" cy="250825"/>
           </a:xfrm>
           <a:prstGeom prst="rect">
             <a:avLst/>
@@ -7044,9 +7590,16 @@
           </a:bodyPr>
           <a:lstStyle/>
           <a:p>
-            <a:pPr algn="l"/>
-            <a:r>
-              <a:rPr sz="1500" b="1">
+            <a:pPr algn="l">
+              <a:spcBef>
+                <a:spcPts val="0"/>
+              </a:spcBef>
+              <a:spcAft>
+                <a:spcPts val="0"/>
+              </a:spcAft>
+            </a:pPr>
+            <a:r>
+              <a:rPr sz="1500" b="1" lang="zh-CN" altLang="zh-CN">
                 <a:solidFill>
                   <a:srgbClr val="008C95"/>
                 </a:solidFill>
@@ -7081,9 +7634,16 @@
           </a:bodyPr>
           <a:lstStyle/>
           <a:p>
-            <a:pPr algn="l"/>
-            <a:r>
-              <a:rPr sz="1000" b="0">
+            <a:pPr algn="l">
+              <a:spcBef>
+                <a:spcPts val="0"/>
+              </a:spcBef>
+              <a:spcAft>
+                <a:spcPts val="0"/>
+              </a:spcAft>
+            </a:pPr>
+            <a:r>
+              <a:rPr sz="1000" b="0" lang="zh-CN" altLang="zh-CN">
                 <a:solidFill>
                   <a:srgbClr val="14213D"/>
                 </a:solidFill>
@@ -7172,7 +7732,14 @@
           <a:bodyPr rtlCol="0" anchor="ctr"/>
           <a:lstStyle/>
           <a:p>
-            <a:pPr algn="ctr"/>
+            <a:pPr algn="ctr">
+              <a:spcBef>
+                <a:spcPts val="0"/>
+              </a:spcBef>
+              <a:spcAft>
+                <a:spcPts val="0"/>
+              </a:spcAft>
+            </a:pPr>
           </a:p>
         </p:txBody>
       </p:sp>
@@ -7254,8 +7821,8 @@
         </p:nvSpPr>
         <p:spPr>
           <a:xfrm>
-            <a:off x="9499600" y="5397500"/>
-            <a:ext cx="1460500" cy="190500"/>
+            <a:off x="9499600" y="5367337"/>
+            <a:ext cx="1460500" cy="250825"/>
           </a:xfrm>
           <a:prstGeom prst="rect">
             <a:avLst/>
@@ -7268,9 +7835,16 @@
           </a:bodyPr>
           <a:lstStyle/>
           <a:p>
-            <a:pPr algn="l"/>
-            <a:r>
-              <a:rPr sz="1500" b="1">
+            <a:pPr algn="l">
+              <a:spcBef>
+                <a:spcPts val="0"/>
+              </a:spcBef>
+              <a:spcAft>
+                <a:spcPts val="0"/>
+              </a:spcAft>
+            </a:pPr>
+            <a:r>
+              <a:rPr sz="1500" b="1" lang="zh-CN" altLang="zh-CN">
                 <a:solidFill>
                   <a:srgbClr val="F97316"/>
                 </a:solidFill>
@@ -7291,8 +7865,8 @@
         </p:nvSpPr>
         <p:spPr>
           <a:xfrm>
-            <a:off x="9499600" y="5651500"/>
-            <a:ext cx="952500" cy="177800"/>
+            <a:off x="9499600" y="5614987"/>
+            <a:ext cx="952500" cy="250825"/>
           </a:xfrm>
           <a:prstGeom prst="rect">
             <a:avLst/>
@@ -7305,9 +7879,16 @@
           </a:bodyPr>
           <a:lstStyle/>
           <a:p>
-            <a:pPr algn="l"/>
-            <a:r>
-              <a:rPr sz="1500" b="1">
+            <a:pPr algn="l">
+              <a:spcBef>
+                <a:spcPts val="0"/>
+              </a:spcBef>
+              <a:spcAft>
+                <a:spcPts val="0"/>
+              </a:spcAft>
+            </a:pPr>
+            <a:r>
+              <a:rPr sz="1500" b="1" lang="zh-CN" altLang="zh-CN">
                 <a:solidFill>
                   <a:srgbClr val="F97316"/>
                 </a:solidFill>
@@ -7342,9 +7923,16 @@
           </a:bodyPr>
           <a:lstStyle/>
           <a:p>
-            <a:pPr algn="l"/>
-            <a:r>
-              <a:rPr sz="1000" b="0">
+            <a:pPr algn="l">
+              <a:spcBef>
+                <a:spcPts val="0"/>
+              </a:spcBef>
+              <a:spcAft>
+                <a:spcPts val="0"/>
+              </a:spcAft>
+            </a:pPr>
+            <a:r>
+              <a:rPr sz="1000" b="0" lang="zh-CN" altLang="zh-CN">
                 <a:solidFill>
                   <a:srgbClr val="14213D"/>
                 </a:solidFill>
@@ -7414,9 +8002,16 @@
           </a:bodyPr>
           <a:lstStyle/>
           <a:p>
-            <a:pPr algn="l"/>
-            <a:r>
-              <a:rPr sz="900" b="0">
+            <a:pPr algn="l">
+              <a:spcBef>
+                <a:spcPts val="0"/>
+              </a:spcBef>
+              <a:spcAft>
+                <a:spcPts val="0"/>
+              </a:spcAft>
+            </a:pPr>
+            <a:r>
+              <a:rPr sz="900" b="0" lang="zh-CN" altLang="zh-CN">
                 <a:solidFill>
                   <a:srgbClr val="617089"/>
                 </a:solidFill>
